--- a/media/resources/files/Onduktar_Akcha_Bolup_Toloo_menen_TuuraJeKata_rFDSZLE.pptx
+++ b/media/resources/files/Onduktar_Akcha_Bolup_Toloo_menen_TuuraJeKata_rFDSZLE.pptx
@@ -4848,7 +4848,7 @@
             </a:pPr>
             <a:r>
               <a:rPr lang="ru-RU" dirty="0"/>
-              <a:t>Турдуу пикирлер учун ыраазычылык билдиребиз.</a:t>
+              <a:t>Түрдүү пикирлер үчүн ыраазычылык билдиребиз.</a:t>
             </a:r>
           </a:p>
           <a:p>

--- a/media/resources/files/Onduktar_Akcha_Bolup_Toloo_menen_TuuraJeKata_rFDSZLE.pptx
+++ b/media/resources/files/Onduktar_Akcha_Bolup_Toloo_menen_TuuraJeKata_rFDSZLE.pptx
@@ -4623,7 +4623,7 @@
           <a:p>
             <a:r>
               <a:rPr lang="ru-RU" dirty="0"/>
-              <a:t>Бул ресурс математикалык ыкманын жандуу демонстрацияларын камсыз кылат.</a:t>
+              <a:t>Бул ресурс ыкманы жандуу көрсөтөт.</a:t>
             </a:r>
           </a:p>
           <a:p>
@@ -6828,7 +6828,7 @@
             <a:pPr algn="ctr"/>
             <a:r>
               <a:rPr lang="en-GB" sz="1600" dirty="0"/>
-              <a:t>4694.30</a:t>
+              <a:t>4694,30</a:t>
             </a:r>
             <a:r>
               <a:rPr lang="ky-KG" sz="1600" dirty="0"/>
@@ -10903,7 +10903,7 @@
             <a:pPr algn="ctr"/>
             <a:r>
               <a:rPr lang="en-GB" sz="1600" dirty="0"/>
-              <a:t>4694.30</a:t>
+              <a:t>4694,30</a:t>
             </a:r>
             <a:r>
               <a:rPr lang="ky-KG" sz="1600" dirty="0"/>
@@ -13619,7 +13619,7 @@
             <a:pPr algn="ctr"/>
             <a:r>
               <a:rPr lang="en-GB" sz="1600" dirty="0"/>
-              <a:t>4694.30</a:t>
+              <a:t>4694,30</a:t>
             </a:r>
             <a:r>
               <a:rPr lang="ky-KG" sz="1600" dirty="0"/>
@@ -14646,7 +14646,7 @@
             <a:pPr algn="ctr"/>
             <a:r>
               <a:rPr lang="en-GB" sz="1600" dirty="0"/>
-              <a:t>8.1%</a:t>
+              <a:t>8,1%</a:t>
             </a:r>
           </a:p>
         </p:txBody>
@@ -18249,7 +18249,7 @@
                 <a:ea typeface="+mn-ea"/>
                 <a:cs typeface="+mn-cs"/>
               </a:rPr>
-              <a:t>4694.30</a:t>
+              <a:t>4694,30</a:t>
             </a:r>
             <a:r>
               <a:rPr kumimoji="0" lang="ky-KG" sz="1600" b="0" i="0" u="none" strike="noStrike" kern="1200" cap="none" spc="0" normalizeH="0" baseline="0" noProof="0" dirty="0">

--- a/media/resources/files/Onduktar_Akcha_Bolup_Toloo_menen_TuuraJeKata_rFDSZLE.pptx
+++ b/media/resources/files/Onduktar_Akcha_Bolup_Toloo_menen_TuuraJeKata_rFDSZLE.pptx
@@ -6208,7 +6208,7 @@
             <a:pPr algn="ctr"/>
             <a:r>
               <a:rPr lang="en-GB" sz="1600" dirty="0"/>
-              <a:t>6944</a:t>
+              <a:t>69 44</a:t>
             </a:r>
             <a:r>
               <a:rPr lang="ky-KG" sz="1600" dirty="0"/>
@@ -6264,7 +6264,7 @@
             </a:pPr>
             <a:r>
               <a:rPr lang="ru-RU" dirty="0"/>
-              <a:t>Депозит: 50000 сом</a:t>
+              <a:t>Депозит: 50 000 сом</a:t>
             </a:r>
           </a:p>
           <a:p>
@@ -6334,7 +6334,7 @@
             <a:pPr algn="ctr"/>
             <a:r>
               <a:rPr lang="en-GB" sz="1600" dirty="0"/>
-              <a:t> 2760</a:t>
+              <a:t> 276 0</a:t>
             </a:r>
             <a:r>
               <a:rPr lang="ky-KG" sz="1600" dirty="0"/>
@@ -6390,7 +6390,7 @@
             </a:pPr>
             <a:r>
               <a:rPr lang="ky-KG" dirty="0"/>
-              <a:t>Жалпы баасы: 49450 сом</a:t>
+              <a:t>Жалпы баасы: 49 450 сом</a:t>
             </a:r>
           </a:p>
           <a:p>
@@ -6516,7 +6516,7 @@
             </a:pPr>
             <a:r>
               <a:rPr lang="ky-KG" dirty="0"/>
-              <a:t>Жалпы баасы: 7980</a:t>
+              <a:t>Жалпы баасы: 79 80</a:t>
             </a:r>
             <a:r>
               <a:rPr lang="en-US" dirty="0"/>
@@ -6594,11 +6594,11 @@
             <a:pPr algn="ctr"/>
             <a:r>
               <a:rPr lang="en-GB" sz="1600" dirty="0"/>
-              <a:t>36</a:t>
+              <a:t>36 900</a:t>
             </a:r>
             <a:r>
               <a:rPr lang="ky-KG" sz="1600" dirty="0"/>
-              <a:t>900</a:t>
+              <a:t/>
             </a:r>
             <a:endParaRPr lang="en-GB" sz="1600" dirty="0"/>
           </a:p>
@@ -6642,7 +6642,7 @@
             <a:pPr algn="ctr"/>
             <a:r>
               <a:rPr lang="ky-KG" dirty="0"/>
-              <a:t>Жалпы баасы: 61115 сом</a:t>
+              <a:t>Жалпы баасы: 61 115 сом</a:t>
             </a:r>
           </a:p>
           <a:p>
@@ -6759,14 +6759,14 @@
             <a:pPr algn="ctr"/>
             <a:r>
               <a:rPr lang="ky-KG" dirty="0"/>
-              <a:t>Жалпы баасы: 44596 сом</a:t>
+              <a:t>Жалпы баасы: 44 596 сом</a:t>
             </a:r>
           </a:p>
           <a:p>
             <a:pPr algn="ctr"/>
             <a:r>
               <a:rPr lang="ky-KG" dirty="0"/>
-              <a:t>Депозит: 16430 сом</a:t>
+              <a:t>Депозит: 16 430 сом</a:t>
             </a:r>
           </a:p>
           <a:p>
@@ -6876,14 +6876,14 @@
             <a:pPr algn="ctr"/>
             <a:r>
               <a:rPr lang="ky-KG" dirty="0"/>
-              <a:t>Жалпы баасы: 87179 сом</a:t>
+              <a:t>Жалпы баасы: 87 179 сом</a:t>
             </a:r>
           </a:p>
           <a:p>
             <a:pPr algn="ctr"/>
             <a:r>
               <a:rPr lang="ky-KG" dirty="0"/>
-              <a:t>Депозит: 25706 сом</a:t>
+              <a:t>Депозит: 25 706 сом</a:t>
             </a:r>
           </a:p>
           <a:p>
@@ -6982,21 +6982,21 @@
             <a:pPr algn="ctr"/>
             <a:r>
               <a:rPr lang="ky-KG" dirty="0"/>
-              <a:t>Жалпы баасы: 724488 сом</a:t>
+              <a:t>Жалпы баасы: 724 488 сом</a:t>
             </a:r>
           </a:p>
           <a:p>
             <a:pPr algn="ctr"/>
             <a:r>
               <a:rPr lang="ky-KG" dirty="0"/>
-              <a:t>Депозит: 139712 сом</a:t>
+              <a:t>Депозит: 139 712 сом</a:t>
             </a:r>
           </a:p>
           <a:p>
             <a:pPr algn="ctr"/>
             <a:r>
               <a:rPr lang="ky-KG" dirty="0"/>
-              <a:t>12183 сом айлык төлөм</a:t>
+              <a:t>12 183 сом айлык төлөм</a:t>
             </a:r>
             <a:endParaRPr lang="en-GB" dirty="0"/>
           </a:p>
@@ -7092,14 +7092,14 @@
             <a:pPr algn="ctr"/>
             <a:r>
               <a:rPr lang="ru-RU" dirty="0"/>
-              <a:t>Баасы = 62590 сом</a:t>
+              <a:t>Баасы = 62 590 сом</a:t>
             </a:r>
           </a:p>
           <a:p>
             <a:pPr algn="ctr"/>
             <a:r>
               <a:rPr lang="ru-RU" dirty="0"/>
-              <a:t>ЖЕ Депозит 12294 сом</a:t>
+              <a:t>ЖЕ Депозит 12 294 сом</a:t>
             </a:r>
           </a:p>
           <a:p>
@@ -7223,21 +7223,21 @@
             <a:pPr algn="ctr"/>
             <a:r>
               <a:rPr lang="ru-RU" dirty="0"/>
-              <a:t>Баасы = 458253 сом</a:t>
+              <a:t>Баасы = 458 253 сом</a:t>
             </a:r>
           </a:p>
           <a:p>
             <a:pPr algn="ctr"/>
             <a:r>
               <a:rPr lang="ru-RU" dirty="0"/>
-              <a:t>ЖЕ Депозит: 98356 сом</a:t>
+              <a:t>ЖЕ Депозит: 98 356 сом</a:t>
             </a:r>
           </a:p>
           <a:p>
             <a:pPr algn="ctr"/>
             <a:r>
               <a:rPr lang="ru-RU" dirty="0"/>
-              <a:t>&amp; 16542 сом 24 ай сайын төлөө</a:t>
+              <a:t>&amp; 16 542 сом 24 ай сайын төлөө</a:t>
             </a:r>
             <a:endParaRPr lang="en-GB" dirty="0"/>
           </a:p>
@@ -8166,7 +8166,7 @@
             <a:pPr algn="ctr"/>
             <a:r>
               <a:rPr lang="en-GB" sz="1600" dirty="0"/>
-              <a:t>6944</a:t>
+              <a:t>69 44</a:t>
             </a:r>
             <a:r>
               <a:rPr lang="ky-KG" sz="1600" dirty="0"/>
@@ -8222,7 +8222,7 @@
             </a:pPr>
             <a:r>
               <a:rPr lang="ru-RU" dirty="0"/>
-              <a:t>Депозит: 50000 сом</a:t>
+              <a:t>Депозит: 50 000 сом</a:t>
             </a:r>
           </a:p>
           <a:p>
@@ -8292,7 +8292,7 @@
             <a:pPr algn="ctr"/>
             <a:r>
               <a:rPr lang="en-GB" sz="1600" dirty="0"/>
-              <a:t> 2760</a:t>
+              <a:t> 276 0</a:t>
             </a:r>
             <a:r>
               <a:rPr lang="ky-KG" sz="1600" dirty="0"/>
@@ -8348,7 +8348,7 @@
             </a:pPr>
             <a:r>
               <a:rPr lang="ky-KG" dirty="0"/>
-              <a:t>Жалпы баасы: 49450 сом</a:t>
+              <a:t>Жалпы баасы: 49 450 сом</a:t>
             </a:r>
           </a:p>
           <a:p>
@@ -8474,7 +8474,7 @@
             </a:pPr>
             <a:r>
               <a:rPr lang="ky-KG" dirty="0"/>
-              <a:t>Жалпы баасы: 7980</a:t>
+              <a:t>Жалпы баасы: 79 80</a:t>
             </a:r>
             <a:r>
               <a:rPr lang="en-US" dirty="0"/>
@@ -8552,11 +8552,11 @@
             <a:pPr algn="ctr"/>
             <a:r>
               <a:rPr lang="en-GB" sz="1600" dirty="0"/>
-              <a:t>36</a:t>
+              <a:t>36 900</a:t>
             </a:r>
             <a:r>
               <a:rPr lang="ky-KG" sz="1600" dirty="0"/>
-              <a:t>900</a:t>
+              <a:t/>
             </a:r>
             <a:endParaRPr lang="en-GB" sz="1600" dirty="0"/>
           </a:p>
@@ -8600,7 +8600,7 @@
             <a:pPr algn="ctr"/>
             <a:r>
               <a:rPr lang="ky-KG" dirty="0"/>
-              <a:t>Жалпы баасы: 61115 сом</a:t>
+              <a:t>Жалпы баасы: 61 115 сом</a:t>
             </a:r>
           </a:p>
           <a:p>
@@ -8717,14 +8717,14 @@
             <a:pPr algn="ctr"/>
             <a:r>
               <a:rPr lang="ky-KG" dirty="0"/>
-              <a:t>Жалпы баасы: 87179 сом</a:t>
+              <a:t>Жалпы баасы: 87 179 сом</a:t>
             </a:r>
           </a:p>
           <a:p>
             <a:pPr algn="ctr"/>
             <a:r>
               <a:rPr lang="ky-KG" dirty="0"/>
-              <a:t>Депозит: 25706 сом</a:t>
+              <a:t>Депозит: 25 706 сом</a:t>
             </a:r>
           </a:p>
           <a:p>
@@ -10283,7 +10283,7 @@
             <a:pPr algn="ctr"/>
             <a:r>
               <a:rPr lang="en-GB" sz="1600" dirty="0"/>
-              <a:t>6944</a:t>
+              <a:t>69 44</a:t>
             </a:r>
             <a:r>
               <a:rPr lang="ky-KG" sz="1600" dirty="0"/>
@@ -10339,7 +10339,7 @@
             </a:pPr>
             <a:r>
               <a:rPr lang="ru-RU" dirty="0"/>
-              <a:t>Депозит: 50000 сом</a:t>
+              <a:t>Депозит: 50 000 сом</a:t>
             </a:r>
           </a:p>
           <a:p>
@@ -10409,7 +10409,7 @@
             <a:pPr algn="ctr"/>
             <a:r>
               <a:rPr lang="en-GB" sz="1600" dirty="0"/>
-              <a:t> 2760</a:t>
+              <a:t> 276 0</a:t>
             </a:r>
             <a:r>
               <a:rPr lang="ky-KG" sz="1600" dirty="0"/>
@@ -10465,7 +10465,7 @@
             </a:pPr>
             <a:r>
               <a:rPr lang="ky-KG" dirty="0"/>
-              <a:t>Жалпы баасы: 49450 сом</a:t>
+              <a:t>Жалпы баасы: 49 450 сом</a:t>
             </a:r>
           </a:p>
           <a:p>
@@ -10591,7 +10591,7 @@
             </a:pPr>
             <a:r>
               <a:rPr lang="ky-KG" dirty="0"/>
-              <a:t>Жалпы баасы: 7980</a:t>
+              <a:t>Жалпы баасы: 79 80</a:t>
             </a:r>
             <a:r>
               <a:rPr lang="en-US" dirty="0"/>
@@ -10669,11 +10669,11 @@
             <a:pPr algn="ctr"/>
             <a:r>
               <a:rPr lang="en-GB" sz="1600" dirty="0"/>
-              <a:t>36</a:t>
+              <a:t>36 900</a:t>
             </a:r>
             <a:r>
               <a:rPr lang="ky-KG" sz="1600" dirty="0"/>
-              <a:t>900</a:t>
+              <a:t/>
             </a:r>
             <a:endParaRPr lang="en-GB" sz="1600" dirty="0"/>
           </a:p>
@@ -10717,7 +10717,7 @@
             <a:pPr algn="ctr"/>
             <a:r>
               <a:rPr lang="ky-KG" dirty="0"/>
-              <a:t>Жалпы баасы: 61115 сом</a:t>
+              <a:t>Жалпы баасы: 61 115 сом</a:t>
             </a:r>
           </a:p>
           <a:p>
@@ -10834,14 +10834,14 @@
             <a:pPr algn="ctr"/>
             <a:r>
               <a:rPr lang="ky-KG" dirty="0"/>
-              <a:t>Жалпы баасы: 44596 сом</a:t>
+              <a:t>Жалпы баасы: 44 596 сом</a:t>
             </a:r>
           </a:p>
           <a:p>
             <a:pPr algn="ctr"/>
             <a:r>
               <a:rPr lang="ky-KG" dirty="0"/>
-              <a:t>Депозит: 16430 сом</a:t>
+              <a:t>Депозит: 16 430 сом</a:t>
             </a:r>
           </a:p>
           <a:p>
@@ -10951,14 +10951,14 @@
             <a:pPr algn="ctr"/>
             <a:r>
               <a:rPr lang="ky-KG" dirty="0"/>
-              <a:t>Жалпы баасы: 87179 сом</a:t>
+              <a:t>Жалпы баасы: 87 179 сом</a:t>
             </a:r>
           </a:p>
           <a:p>
             <a:pPr algn="ctr"/>
             <a:r>
               <a:rPr lang="ky-KG" dirty="0"/>
-              <a:t>Депозит: 25706 сом</a:t>
+              <a:t>Депозит: 25 706 сом</a:t>
             </a:r>
           </a:p>
           <a:p>
@@ -11057,21 +11057,21 @@
             <a:pPr algn="ctr"/>
             <a:r>
               <a:rPr lang="ky-KG" dirty="0"/>
-              <a:t>Жалпы баасы: 724488 сом</a:t>
+              <a:t>Жалпы баасы: 724 488 сом</a:t>
             </a:r>
           </a:p>
           <a:p>
             <a:pPr algn="ctr"/>
             <a:r>
               <a:rPr lang="ky-KG" dirty="0"/>
-              <a:t>Депозит: 139712 сом</a:t>
+              <a:t>Депозит: 139 712 сом</a:t>
             </a:r>
           </a:p>
           <a:p>
             <a:pPr algn="ctr"/>
             <a:r>
               <a:rPr lang="ky-KG" dirty="0"/>
-              <a:t>12183 сом айлык төлөм</a:t>
+              <a:t>12 183 сом айлык төлөм</a:t>
             </a:r>
             <a:endParaRPr lang="en-GB" dirty="0"/>
           </a:p>
@@ -11167,14 +11167,14 @@
             <a:pPr algn="ctr"/>
             <a:r>
               <a:rPr lang="ru-RU" dirty="0"/>
-              <a:t>Баасы = 62590 сом</a:t>
+              <a:t>Баасы = 62 590 сом</a:t>
             </a:r>
           </a:p>
           <a:p>
             <a:pPr algn="ctr"/>
             <a:r>
               <a:rPr lang="ru-RU" dirty="0"/>
-              <a:t>ЖЕ Депозит 12294 сом</a:t>
+              <a:t>ЖЕ Депозит 12 294 сом</a:t>
             </a:r>
           </a:p>
           <a:p>
@@ -11298,21 +11298,21 @@
             <a:pPr algn="ctr"/>
             <a:r>
               <a:rPr lang="ru-RU" dirty="0"/>
-              <a:t>Баасы = 458253 сом</a:t>
+              <a:t>Баасы = 458 253 сом</a:t>
             </a:r>
           </a:p>
           <a:p>
             <a:pPr algn="ctr"/>
             <a:r>
               <a:rPr lang="ru-RU" dirty="0"/>
-              <a:t>ЖЕ Депозит: 98356 сом</a:t>
+              <a:t>ЖЕ Депозит: 98 356 сом</a:t>
             </a:r>
           </a:p>
           <a:p>
             <a:pPr algn="ctr"/>
             <a:r>
               <a:rPr lang="ru-RU" dirty="0"/>
-              <a:t>&amp; 16542 сом 24 ай сайын төлөө</a:t>
+              <a:t>&amp; 16 542 сом 24 ай сайын төлөө</a:t>
             </a:r>
             <a:endParaRPr lang="en-GB" dirty="0"/>
           </a:p>
@@ -13047,7 +13047,7 @@
             </a:pPr>
             <a:r>
               <a:rPr lang="ru-RU" dirty="0"/>
-              <a:t>Депозит: 50000 сом</a:t>
+              <a:t>Депозит: 50 000 сом</a:t>
             </a:r>
           </a:p>
           <a:p>
@@ -13117,7 +13117,7 @@
             <a:pPr algn="ctr"/>
             <a:r>
               <a:rPr lang="en-GB" sz="1600" dirty="0"/>
-              <a:t> 2760</a:t>
+              <a:t> 276 0</a:t>
             </a:r>
             <a:r>
               <a:rPr lang="ky-KG" sz="1600" dirty="0"/>
@@ -13173,7 +13173,7 @@
             </a:pPr>
             <a:r>
               <a:rPr lang="ky-KG" dirty="0"/>
-              <a:t>Жалпы баасы: 49450 сом</a:t>
+              <a:t>Жалпы баасы: 49 450 сом</a:t>
             </a:r>
           </a:p>
           <a:p>
@@ -13299,7 +13299,7 @@
             </a:pPr>
             <a:r>
               <a:rPr lang="ky-KG" dirty="0"/>
-              <a:t>Жалпы баасы: 7980</a:t>
+              <a:t>Жалпы баасы: 79 80</a:t>
             </a:r>
             <a:r>
               <a:rPr lang="en-US" dirty="0"/>
@@ -13377,11 +13377,11 @@
             <a:pPr algn="ctr"/>
             <a:r>
               <a:rPr lang="en-GB" sz="1600" dirty="0"/>
-              <a:t>36</a:t>
+              <a:t>36 900</a:t>
             </a:r>
             <a:r>
               <a:rPr lang="ky-KG" sz="1600" dirty="0"/>
-              <a:t>900</a:t>
+              <a:t/>
             </a:r>
             <a:endParaRPr lang="en-GB" sz="1600" dirty="0"/>
           </a:p>
@@ -13425,7 +13425,7 @@
             <a:pPr algn="ctr"/>
             <a:r>
               <a:rPr lang="ky-KG" dirty="0"/>
-              <a:t>Жалпы баасы: 61115 сом</a:t>
+              <a:t>Жалпы баасы: 61 115 сом</a:t>
             </a:r>
           </a:p>
           <a:p>
@@ -13550,14 +13550,14 @@
             <a:pPr algn="ctr"/>
             <a:r>
               <a:rPr lang="ky-KG" dirty="0"/>
-              <a:t>Жалпы баасы: 44596 сом</a:t>
+              <a:t>Жалпы баасы: 44 596 сом</a:t>
             </a:r>
           </a:p>
           <a:p>
             <a:pPr algn="ctr"/>
             <a:r>
               <a:rPr lang="ky-KG" dirty="0"/>
-              <a:t>Депозит: 16430 сом</a:t>
+              <a:t>Депозит: 16 430 сом</a:t>
             </a:r>
           </a:p>
           <a:p>
@@ -13667,14 +13667,14 @@
             <a:pPr algn="ctr"/>
             <a:r>
               <a:rPr lang="ky-KG" dirty="0"/>
-              <a:t>Жалпы баасы: 87179 сом</a:t>
+              <a:t>Жалпы баасы: 87 179 сом</a:t>
             </a:r>
           </a:p>
           <a:p>
             <a:pPr algn="ctr"/>
             <a:r>
               <a:rPr lang="ky-KG" dirty="0"/>
-              <a:t>Депозит: 25706 сом</a:t>
+              <a:t>Депозит: 25 706 сом</a:t>
             </a:r>
           </a:p>
           <a:p>
@@ -13773,21 +13773,21 @@
             <a:pPr algn="ctr"/>
             <a:r>
               <a:rPr lang="ky-KG" dirty="0"/>
-              <a:t>Жалпы баасы: 724488 сом</a:t>
+              <a:t>Жалпы баасы: 724 488 сом</a:t>
             </a:r>
           </a:p>
           <a:p>
             <a:pPr algn="ctr"/>
             <a:r>
               <a:rPr lang="ky-KG" dirty="0"/>
-              <a:t>Депозит: 139712 сом</a:t>
+              <a:t>Депозит: 139 712 сом</a:t>
             </a:r>
           </a:p>
           <a:p>
             <a:pPr algn="ctr"/>
             <a:r>
               <a:rPr lang="ky-KG" dirty="0"/>
-              <a:t>12183 сом айлык төлөм</a:t>
+              <a:t>12 183 сом айлык төлөм</a:t>
             </a:r>
             <a:endParaRPr lang="en-GB" dirty="0"/>
           </a:p>
@@ -13883,14 +13883,14 @@
             <a:pPr algn="ctr"/>
             <a:r>
               <a:rPr lang="ru-RU" dirty="0"/>
-              <a:t>Баасы = 62590 сом</a:t>
+              <a:t>Баасы = 62 590 сом</a:t>
             </a:r>
           </a:p>
           <a:p>
             <a:pPr algn="ctr"/>
             <a:r>
               <a:rPr lang="ru-RU" dirty="0"/>
-              <a:t>ЖЕ Депозит 12294 сом</a:t>
+              <a:t>ЖЕ Депозит 12 294 сом</a:t>
             </a:r>
           </a:p>
           <a:p>
@@ -14014,21 +14014,21 @@
             <a:pPr algn="ctr"/>
             <a:r>
               <a:rPr lang="ru-RU" dirty="0"/>
-              <a:t>Баасы = 458253 сом</a:t>
+              <a:t>Баасы = 458 253 сом</a:t>
             </a:r>
           </a:p>
           <a:p>
             <a:pPr algn="ctr"/>
             <a:r>
               <a:rPr lang="ru-RU" dirty="0"/>
-              <a:t>ЖЕ Депозит: 98356 сом</a:t>
+              <a:t>ЖЕ Депозит: 98 356 сом</a:t>
             </a:r>
           </a:p>
           <a:p>
             <a:pPr algn="ctr"/>
             <a:r>
               <a:rPr lang="ru-RU" dirty="0"/>
-              <a:t>&amp; 16542 сом 24 ай сайын төлөө</a:t>
+              <a:t>&amp; 16 542 сом 24 ай сайын төлөө</a:t>
             </a:r>
             <a:endParaRPr lang="en-GB" dirty="0"/>
           </a:p>
@@ -16622,7 +16622,7 @@
                 <a:ea typeface="+mn-ea"/>
                 <a:cs typeface="+mn-cs"/>
               </a:rPr>
-              <a:t>6944</a:t>
+              <a:t>69 44</a:t>
             </a:r>
             <a:r>
               <a:rPr kumimoji="0" lang="ky-KG" sz="1600" b="0" i="0" u="none" strike="noStrike" kern="1200" cap="none" spc="0" normalizeH="0" baseline="0" noProof="0" dirty="0">
@@ -16754,7 +16754,7 @@
                 <a:ea typeface="+mn-ea"/>
                 <a:cs typeface="+mn-cs"/>
               </a:rPr>
-              <a:t>Депозит: 50000 сом</a:t>
+              <a:t>Депозит: 50 000 сом</a:t>
             </a:r>
           </a:p>
           <a:p>
@@ -16933,7 +16933,7 @@
                 <a:ea typeface="+mn-ea"/>
                 <a:cs typeface="+mn-cs"/>
               </a:rPr>
-              <a:t> 2760</a:t>
+              <a:t> 276 0</a:t>
             </a:r>
             <a:r>
               <a:rPr kumimoji="0" lang="ky-KG" sz="1600" b="0" i="0" u="none" strike="noStrike" kern="1200" cap="none" spc="0" normalizeH="0" baseline="0" noProof="0" dirty="0">
@@ -17065,7 +17065,7 @@
                 <a:ea typeface="+mn-ea"/>
                 <a:cs typeface="+mn-cs"/>
               </a:rPr>
-              <a:t>Жалпы баасы: 49450 сом</a:t>
+              <a:t>Жалпы баасы: 49 450 сом</a:t>
             </a:r>
           </a:p>
           <a:p>
@@ -17376,7 +17376,7 @@
                 <a:ea typeface="+mn-ea"/>
                 <a:cs typeface="+mn-cs"/>
               </a:rPr>
-              <a:t>Жалпы баасы: 7980</a:t>
+              <a:t>Жалпы баасы: 79 80</a:t>
             </a:r>
             <a:r>
               <a:rPr kumimoji="0" lang="en-US" sz="1800" b="0" i="0" u="none" strike="noStrike" kern="1200" cap="none" spc="0" normalizeH="0" baseline="0" noProof="0" dirty="0">
@@ -17589,7 +17589,7 @@
                 <a:ea typeface="+mn-ea"/>
                 <a:cs typeface="+mn-cs"/>
               </a:rPr>
-              <a:t>36</a:t>
+              <a:t>36 900</a:t>
             </a:r>
             <a:r>
               <a:rPr kumimoji="0" lang="ky-KG" sz="1600" b="0" i="0" u="none" strike="noStrike" kern="1200" cap="none" spc="0" normalizeH="0" baseline="0" noProof="0" dirty="0">
@@ -17606,7 +17606,7 @@
                 <a:ea typeface="+mn-ea"/>
                 <a:cs typeface="+mn-cs"/>
               </a:rPr>
-              <a:t>900</a:t>
+              <a:t/>
             </a:r>
             <a:endParaRPr kumimoji="0" lang="en-GB" sz="1600" b="0" i="0" u="none" strike="noStrike" kern="1200" cap="none" spc="0" normalizeH="0" baseline="0" noProof="0" dirty="0">
               <a:ln>
@@ -17721,7 +17721,7 @@
                 <a:ea typeface="+mn-ea"/>
                 <a:cs typeface="+mn-cs"/>
               </a:rPr>
-              <a:t>Жалпы баасы: 61115 сом</a:t>
+              <a:t>Жалпы баасы: 61 115 сом</a:t>
             </a:r>
           </a:p>
           <a:p>
@@ -18051,7 +18051,7 @@
                 <a:ea typeface="+mn-ea"/>
                 <a:cs typeface="+mn-cs"/>
               </a:rPr>
-              <a:t>Жалпы баасы: 44596 сом</a:t>
+              <a:t>Жалпы баасы: 44 596 сом</a:t>
             </a:r>
           </a:p>
           <a:p>
@@ -18087,7 +18087,7 @@
                 <a:ea typeface="+mn-ea"/>
                 <a:cs typeface="+mn-cs"/>
               </a:rPr>
-              <a:t>Депозит: 16430 сом</a:t>
+              <a:t>Депозит: 16 430 сом</a:t>
             </a:r>
           </a:p>
           <a:p>
@@ -18381,7 +18381,7 @@
                 <a:ea typeface="+mn-ea"/>
                 <a:cs typeface="+mn-cs"/>
               </a:rPr>
-              <a:t>Жалпы баасы: 87179 сом</a:t>
+              <a:t>Жалпы баасы: 87 179 сом</a:t>
             </a:r>
           </a:p>
           <a:p>
@@ -18417,7 +18417,7 @@
                 <a:ea typeface="+mn-ea"/>
                 <a:cs typeface="+mn-cs"/>
               </a:rPr>
-              <a:t>Депозит: 25706 сом</a:t>
+              <a:t>Депозит: 25 706 сом</a:t>
             </a:r>
           </a:p>
           <a:p>
@@ -18658,7 +18658,7 @@
                 <a:ea typeface="+mn-ea"/>
                 <a:cs typeface="+mn-cs"/>
               </a:rPr>
-              <a:t>Жалпы баасы: 724488 сом</a:t>
+              <a:t>Жалпы баасы: 724 488 сом</a:t>
             </a:r>
           </a:p>
           <a:p>
@@ -18694,7 +18694,7 @@
                 <a:ea typeface="+mn-ea"/>
                 <a:cs typeface="+mn-cs"/>
               </a:rPr>
-              <a:t>Депозит: 139712 сом</a:t>
+              <a:t>Депозит: 139 712 сом</a:t>
             </a:r>
           </a:p>
           <a:p>
@@ -18730,7 +18730,7 @@
                 <a:ea typeface="+mn-ea"/>
                 <a:cs typeface="+mn-cs"/>
               </a:rPr>
-              <a:t>12183 сом айлык төлөм</a:t>
+              <a:t>12 183 сом айлык төлөм</a:t>
             </a:r>
             <a:endParaRPr kumimoji="0" lang="en-GB" sz="1800" b="0" i="0" u="none" strike="noStrike" kern="1200" cap="none" spc="0" normalizeH="0" baseline="0" noProof="0" dirty="0">
               <a:ln>
@@ -18952,7 +18952,7 @@
                 <a:ea typeface="+mn-ea"/>
                 <a:cs typeface="+mn-cs"/>
               </a:rPr>
-              <a:t>Баасы = 62590 сом</a:t>
+              <a:t>Баасы = 62 590 сом</a:t>
             </a:r>
           </a:p>
           <a:p>
@@ -18988,7 +18988,7 @@
                 <a:ea typeface="+mn-ea"/>
                 <a:cs typeface="+mn-cs"/>
               </a:rPr>
-              <a:t>ЖЕ Депозит 12294 сом</a:t>
+              <a:t>ЖЕ Депозит 12 294 сом</a:t>
             </a:r>
           </a:p>
           <a:p>
@@ -19354,7 +19354,7 @@
                 <a:ea typeface="+mn-ea"/>
                 <a:cs typeface="+mn-cs"/>
               </a:rPr>
-              <a:t>Баасы = 458253 сом</a:t>
+              <a:t>Баасы = 458 253 сом</a:t>
             </a:r>
           </a:p>
           <a:p>
@@ -19390,7 +19390,7 @@
                 <a:ea typeface="+mn-ea"/>
                 <a:cs typeface="+mn-cs"/>
               </a:rPr>
-              <a:t>ЖЕ Депозит: 98356 сом</a:t>
+              <a:t>ЖЕ Депозит: 98 356 сом</a:t>
             </a:r>
           </a:p>
           <a:p>
@@ -19426,7 +19426,7 @@
                 <a:ea typeface="+mn-ea"/>
                 <a:cs typeface="+mn-cs"/>
               </a:rPr>
-              <a:t>&amp; 16542 сом 24 ай сайын төлөө</a:t>
+              <a:t>&amp; 16 542 сом 24 ай сайын төлөө</a:t>
             </a:r>
             <a:endParaRPr kumimoji="0" lang="en-GB" sz="1800" b="0" i="0" u="none" strike="noStrike" kern="1200" cap="none" spc="0" normalizeH="0" baseline="0" noProof="0" dirty="0">
               <a:ln>
